--- a/slides/decks/s16-mds-mpn.pptx
+++ b/slides/decks/s16-mds-mpn.pptx
@@ -137,13 +137,13 @@
   <p:extLst>
     <p:ext uri="{521415D9-36F7-43E2-AB2F-B90AF26B5E84}">
       <p14:sectionLst xmlns:p14="http://schemas.microsoft.com/office/powerpoint/2010/main">
-        <p14:section name="Opening" id="{5335d46c-b2db-ccc1-2f47-5a258c4c6eaf}">
+        <p14:section name="Opening" id="{44e42dec-338a-0b5c-b08f-69124bcf10af}">
           <p14:sldIdLst>
             <p14:sldId id="256"/>
             <p14:sldId id="257"/>
           </p14:sldIdLst>
         </p14:section>
-        <p14:section name="MDS" id="{62a12274-6ea4-5982-2cab-f87f39129f10}">
+        <p14:section name="MDS" id="{c0d87986-8fe3-afff-fc78-b92e1d4f3ca7}">
           <p14:sldIdLst>
             <p14:sldId id="258"/>
             <p14:sldId id="259"/>
@@ -152,7 +152,7 @@
             <p14:sldId id="262"/>
           </p14:sldIdLst>
         </p14:section>
-        <p14:section name="MDS/MPN" id="{ca1ea9dd-b868-1e70-5b4f-c930d5180bc3}">
+        <p14:section name="MDS/MPN" id="{e4b68287-7d28-6216-fe85-9e0cd91a97f2}">
           <p14:sldIdLst>
             <p14:sldId id="263"/>
             <p14:sldId id="264"/>
@@ -160,7 +160,7 @@
             <p14:sldId id="266"/>
           </p14:sldIdLst>
         </p14:section>
-        <p14:section name="MPN" id="{c1ae0a4b-5faf-79b2-ea0a-8308ee4f7c4a}">
+        <p14:section name="MPN" id="{69155668-c46e-0765-c2a3-ca94f10b0589}">
           <p14:sldIdLst>
             <p14:sldId id="267"/>
             <p14:sldId id="268"/>
@@ -169,7 +169,7 @@
             <p14:sldId id="271"/>
           </p14:sldIdLst>
         </p14:section>
-        <p14:section name="Board questions" id="{9717349d-ddd1-9df5-34fb-c8ce70de6625}">
+        <p14:section name="Board questions" id="{ceb1ea82-9612-97ea-ff7f-fc1eda3eed94}">
           <p14:sldIdLst>
             <p14:sldId id="272"/>
             <p14:sldId id="273"/>
@@ -179,7 +179,7 @@
             <p14:sldId id="277"/>
           </p14:sldIdLst>
         </p14:section>
-        <p14:section name="References" id="{5cf95703-8b94-d888-cf71-7cef8d3f0a68}">
+        <p14:section name="References" id="{d30837e1-1475-a6d2-64ee-01545aa2f95d}">
           <p14:sldIdLst>
             <p14:sldId id="278"/>
             <p14:sldId id="279"/>
@@ -188,7 +188,7 @@
             <p14:sldId id="282"/>
           </p14:sldIdLst>
         </p14:section>
-        <p14:section name="Backup" id="{ed408eff-b3bd-62e9-7820-c19a661ff622}">
+        <p14:section name="Backup" id="{af36777b-0013-e24e-01b5-7bb9fbe5dedd}">
           <p14:sldIdLst>
             <p14:sldId id="283"/>
             <p14:sldId id="284"/>
